--- a/docs/slides/三層協作工作流_教學投影片.pptx
+++ b/docs/slides/三層協作工作流_教學投影片.pptx
@@ -3537,6 +3537,59 @@
           </a:p>
         </p:txBody>
       </p:sp>
+      <p:sp>
+        <p:nvSpPr>
+          <p:cNvPr id="15" name="Text 13"/>
+          <p:cNvSpPr/>
+          <p:nvPr/>
+        </p:nvSpPr>
+        <p:spPr>
+          <a:xfrm>
+            <a:off x="502920" y="6583680"/>
+            <a:ext cx="11338560" cy="201168"/>
+          </a:xfrm>
+          <a:prstGeom prst="rect">
+            <a:avLst/>
+          </a:prstGeom>
+          <a:noFill/>
+          <a:ln/>
+        </p:spPr>
+        <p:txBody>
+          <a:bodyPr wrap="square" lIns="0" tIns="0" rIns="0" bIns="0" rtlCol="0" anchor="ctr"/>
+          <a:lstStyle/>
+          <a:p>
+            <a:pPr indent="0" marL="0">
+              <a:buNone/>
+            </a:pPr>
+            <a:r>
+              <a:rPr lang="en-US" sz="900" b="1" dirty="0">
+                <a:solidFill>
+                  <a:srgbClr val="E8A33D"/>
+                </a:solidFill>
+                <a:latin typeface="Consolas" pitchFamily="34" charset="0"/>
+                <a:ea typeface="Consolas" pitchFamily="34" charset="-122"/>
+                <a:cs typeface="Consolas" pitchFamily="34" charset="-120"/>
+              </a:rPr>
+              <a:t>‹code›  </a:t>
+            </a:r>
+            <a:pPr indent="0" marL="0">
+              <a:buNone/>
+            </a:pPr>
+            <a:r>
+              <a:rPr lang="en-US" sz="900" dirty="0">
+                <a:solidFill>
+                  <a:srgbClr val="8FA3C8"/>
+                </a:solidFill>
+                <a:latin typeface="Consolas" pitchFamily="34" charset="0"/>
+                <a:ea typeface="Consolas" pitchFamily="34" charset="-122"/>
+                <a:cs typeface="Consolas" pitchFamily="34" charset="-120"/>
+              </a:rPr>
+              <a:t>三層對應：我→config/*.yaml ｜ Claude→src/ + tests/ ｜ OpenEvolve→EVOLVE-BLOCK</a:t>
+            </a:r>
+            <a:endParaRPr lang="en-US" sz="900" dirty="0"/>
+          </a:p>
+        </p:txBody>
+      </p:sp>
     </p:spTree>
   </p:cSld>
   <p:clrMapOvr>
@@ -4226,6 +4279,59 @@
           </a:p>
         </p:txBody>
       </p:sp>
+      <p:sp>
+        <p:nvSpPr>
+          <p:cNvPr id="22" name="Text 20"/>
+          <p:cNvSpPr/>
+          <p:nvPr/>
+        </p:nvSpPr>
+        <p:spPr>
+          <a:xfrm>
+            <a:off x="502920" y="6583680"/>
+            <a:ext cx="11338560" cy="201168"/>
+          </a:xfrm>
+          <a:prstGeom prst="rect">
+            <a:avLst/>
+          </a:prstGeom>
+          <a:noFill/>
+          <a:ln/>
+        </p:spPr>
+        <p:txBody>
+          <a:bodyPr wrap="square" lIns="0" tIns="0" rIns="0" bIns="0" rtlCol="0" anchor="ctr"/>
+          <a:lstStyle/>
+          <a:p>
+            <a:pPr indent="0" marL="0">
+              <a:buNone/>
+            </a:pPr>
+            <a:r>
+              <a:rPr lang="en-US" sz="900" b="1" dirty="0">
+                <a:solidFill>
+                  <a:srgbClr val="E8A33D"/>
+                </a:solidFill>
+                <a:latin typeface="Consolas" pitchFamily="34" charset="0"/>
+                <a:ea typeface="Consolas" pitchFamily="34" charset="-122"/>
+                <a:cs typeface="Consolas" pitchFamily="34" charset="-120"/>
+              </a:rPr>
+              <a:t>‹code›  </a:t>
+            </a:r>
+            <a:pPr indent="0" marL="0">
+              <a:buNone/>
+            </a:pPr>
+            <a:r>
+              <a:rPr lang="en-US" sz="900" dirty="0">
+                <a:solidFill>
+                  <a:srgbClr val="6B7280"/>
+                </a:solidFill>
+                <a:latin typeface="Consolas" pitchFamily="34" charset="0"/>
+                <a:ea typeface="Consolas" pitchFamily="34" charset="-122"/>
+                <a:cs typeface="Consolas" pitchFamily="34" charset="-120"/>
+              </a:rPr>
+              <a:t>規則寫在 CLAUDE.md「Git 工作流程：main 只接受 PR merge，不直接 commit」</a:t>
+            </a:r>
+            <a:endParaRPr lang="en-US" sz="900" dirty="0"/>
+          </a:p>
+        </p:txBody>
+      </p:sp>
     </p:spTree>
   </p:cSld>
   <p:clrMapOvr>
@@ -4659,7 +4765,7 @@
         </p:nvSpPr>
         <p:spPr>
           <a:xfrm>
-            <a:off x="548640" y="5623560"/>
+            <a:off x="548640" y="5577840"/>
             <a:ext cx="11109960" cy="868680"/>
           </a:xfrm>
           <a:prstGeom prst="rect">
@@ -4691,7 +4797,7 @@
         </p:nvSpPr>
         <p:spPr>
           <a:xfrm>
-            <a:off x="868680" y="5623560"/>
+            <a:off x="868680" y="5577840"/>
             <a:ext cx="10515600" cy="868680"/>
           </a:xfrm>
           <a:prstGeom prst="rect">
@@ -4719,6 +4825,59 @@
               <a:t>真實例子：Claude 讀 OpenEvolve 原始碼，發現「EVOLVE-BLOCK 恰好一個」其實是建議、不是硬限制。</a:t>
             </a:r>
             <a:endParaRPr lang="en-US" sz="1450" dirty="0"/>
+          </a:p>
+        </p:txBody>
+      </p:sp>
+      <p:sp>
+        <p:nvSpPr>
+          <p:cNvPr id="17" name="Text 15"/>
+          <p:cNvSpPr/>
+          <p:nvPr/>
+        </p:nvSpPr>
+        <p:spPr>
+          <a:xfrm>
+            <a:off x="502920" y="6583680"/>
+            <a:ext cx="11338560" cy="201168"/>
+          </a:xfrm>
+          <a:prstGeom prst="rect">
+            <a:avLst/>
+          </a:prstGeom>
+          <a:noFill/>
+          <a:ln/>
+        </p:spPr>
+        <p:txBody>
+          <a:bodyPr wrap="square" lIns="0" tIns="0" rIns="0" bIns="0" rtlCol="0" anchor="ctr"/>
+          <a:lstStyle/>
+          <a:p>
+            <a:pPr indent="0" marL="0">
+              <a:buNone/>
+            </a:pPr>
+            <a:r>
+              <a:rPr lang="en-US" sz="900" b="1" dirty="0">
+                <a:solidFill>
+                  <a:srgbClr val="E8A33D"/>
+                </a:solidFill>
+                <a:latin typeface="Consolas" pitchFamily="34" charset="0"/>
+                <a:ea typeface="Consolas" pitchFamily="34" charset="-122"/>
+                <a:cs typeface="Consolas" pitchFamily="34" charset="-120"/>
+              </a:rPr>
+              <a:t>‹code›  </a:t>
+            </a:r>
+            <a:pPr indent="0" marL="0">
+              <a:buNone/>
+            </a:pPr>
+            <a:r>
+              <a:rPr lang="en-US" sz="900" dirty="0">
+                <a:solidFill>
+                  <a:srgbClr val="6B7280"/>
+                </a:solidFill>
+                <a:latin typeface="Consolas" pitchFamily="34" charset="0"/>
+                <a:ea typeface="Consolas" pitchFamily="34" charset="-122"/>
+                <a:cs typeface="Consolas" pitchFamily="34" charset="-120"/>
+              </a:rPr>
+              <a:t>讀碼結論記在 docs/evolution_design_notes.md §9（EVOLVE-BLOCK 機制的真相：parse_evolve_blocks 從未被呼叫）</a:t>
+            </a:r>
+            <a:endParaRPr lang="en-US" sz="900" dirty="0"/>
           </a:p>
         </p:txBody>
       </p:sp>
@@ -5091,6 +5250,59 @@
           </a:p>
         </p:txBody>
       </p:sp>
+      <p:sp>
+        <p:nvSpPr>
+          <p:cNvPr id="11" name="Text 9"/>
+          <p:cNvSpPr/>
+          <p:nvPr/>
+        </p:nvSpPr>
+        <p:spPr>
+          <a:xfrm>
+            <a:off x="502920" y="6583680"/>
+            <a:ext cx="11338560" cy="201168"/>
+          </a:xfrm>
+          <a:prstGeom prst="rect">
+            <a:avLst/>
+          </a:prstGeom>
+          <a:noFill/>
+          <a:ln/>
+        </p:spPr>
+        <p:txBody>
+          <a:bodyPr wrap="square" lIns="0" tIns="0" rIns="0" bIns="0" rtlCol="0" anchor="ctr"/>
+          <a:lstStyle/>
+          <a:p>
+            <a:pPr indent="0" marL="0">
+              <a:buNone/>
+            </a:pPr>
+            <a:r>
+              <a:rPr lang="en-US" sz="900" b="1" dirty="0">
+                <a:solidFill>
+                  <a:srgbClr val="E8A33D"/>
+                </a:solidFill>
+                <a:latin typeface="Consolas" pitchFamily="34" charset="0"/>
+                <a:ea typeface="Consolas" pitchFamily="34" charset="-122"/>
+                <a:cs typeface="Consolas" pitchFamily="34" charset="-120"/>
+              </a:rPr>
+              <a:t>‹code›  </a:t>
+            </a:r>
+            <a:pPr indent="0" marL="0">
+              <a:buNone/>
+            </a:pPr>
+            <a:r>
+              <a:rPr lang="en-US" sz="900" dirty="0">
+                <a:solidFill>
+                  <a:srgbClr val="6B7280"/>
+                </a:solidFill>
+                <a:latin typeface="Consolas" pitchFamily="34" charset="0"/>
+                <a:ea typeface="Consolas" pitchFamily="34" charset="-122"/>
+                <a:cs typeface="Consolas" pitchFamily="34" charset="-120"/>
+              </a:rPr>
+              <a:t>進化空間：config/agents_evolving.yaml:1-44 EVOLVE-BLOCK（prompt）+ evolvable_tools.py:18-58（工具）</a:t>
+            </a:r>
+            <a:endParaRPr lang="en-US" sz="900" dirty="0"/>
+          </a:p>
+        </p:txBody>
+      </p:sp>
     </p:spTree>
   </p:cSld>
   <p:clrMapOvr>
@@ -5650,6 +5862,59 @@
           </a:p>
         </p:txBody>
       </p:sp>
+      <p:sp>
+        <p:nvSpPr>
+          <p:cNvPr id="18" name="Text 16"/>
+          <p:cNvSpPr/>
+          <p:nvPr/>
+        </p:nvSpPr>
+        <p:spPr>
+          <a:xfrm>
+            <a:off x="502920" y="6583680"/>
+            <a:ext cx="11338560" cy="201168"/>
+          </a:xfrm>
+          <a:prstGeom prst="rect">
+            <a:avLst/>
+          </a:prstGeom>
+          <a:noFill/>
+          <a:ln/>
+        </p:spPr>
+        <p:txBody>
+          <a:bodyPr wrap="square" lIns="0" tIns="0" rIns="0" bIns="0" rtlCol="0" anchor="ctr"/>
+          <a:lstStyle/>
+          <a:p>
+            <a:pPr indent="0" marL="0">
+              <a:buNone/>
+            </a:pPr>
+            <a:r>
+              <a:rPr lang="en-US" sz="900" b="1" dirty="0">
+                <a:solidFill>
+                  <a:srgbClr val="E8A33D"/>
+                </a:solidFill>
+                <a:latin typeface="Consolas" pitchFamily="34" charset="0"/>
+                <a:ea typeface="Consolas" pitchFamily="34" charset="-122"/>
+                <a:cs typeface="Consolas" pitchFamily="34" charset="-120"/>
+              </a:rPr>
+              <a:t>‹code›  </a:t>
+            </a:r>
+            <a:pPr indent="0" marL="0">
+              <a:buNone/>
+            </a:pPr>
+            <a:r>
+              <a:rPr lang="en-US" sz="900" dirty="0">
+                <a:solidFill>
+                  <a:srgbClr val="6B7280"/>
+                </a:solidFill>
+                <a:latin typeface="Consolas" pitchFamily="34" charset="0"/>
+                <a:ea typeface="Consolas" pitchFamily="34" charset="-122"/>
+                <a:cs typeface="Consolas" pitchFamily="34" charset="-120"/>
+              </a:rPr>
+              <a:t>「v3 的 36% 崩潰 → 完整架構 0 次」對照見 docs/evolution_design_notes.md §12.7</a:t>
+            </a:r>
+            <a:endParaRPr lang="en-US" sz="900" dirty="0"/>
+          </a:p>
+        </p:txBody>
+      </p:sp>
     </p:spTree>
   </p:cSld>
   <p:clrMapOvr>
@@ -6158,7 +6423,7 @@
         <p:spPr>
           <a:xfrm>
             <a:off x="548640" y="6035040"/>
-            <a:ext cx="11109960" cy="457200"/>
+            <a:ext cx="11109960" cy="365760"/>
           </a:xfrm>
           <a:prstGeom prst="rect">
             <a:avLst/>
@@ -6185,6 +6450,59 @@
               <a:t>好問題的價值高於好答案——是我「往深處問」，把一個隨手的修補逼成可遷移的分層框架。</a:t>
             </a:r>
             <a:endParaRPr lang="en-US" sz="1400" dirty="0"/>
+          </a:p>
+        </p:txBody>
+      </p:sp>
+      <p:sp>
+        <p:nvSpPr>
+          <p:cNvPr id="14" name="Text 12"/>
+          <p:cNvSpPr/>
+          <p:nvPr/>
+        </p:nvSpPr>
+        <p:spPr>
+          <a:xfrm>
+            <a:off x="502920" y="6583680"/>
+            <a:ext cx="11338560" cy="201168"/>
+          </a:xfrm>
+          <a:prstGeom prst="rect">
+            <a:avLst/>
+          </a:prstGeom>
+          <a:noFill/>
+          <a:ln/>
+        </p:spPr>
+        <p:txBody>
+          <a:bodyPr wrap="square" lIns="0" tIns="0" rIns="0" bIns="0" rtlCol="0" anchor="ctr"/>
+          <a:lstStyle/>
+          <a:p>
+            <a:pPr indent="0" marL="0">
+              <a:buNone/>
+            </a:pPr>
+            <a:r>
+              <a:rPr lang="en-US" sz="900" b="1" dirty="0">
+                <a:solidFill>
+                  <a:srgbClr val="E8A33D"/>
+                </a:solidFill>
+                <a:latin typeface="Consolas" pitchFamily="34" charset="0"/>
+                <a:ea typeface="Consolas" pitchFamily="34" charset="-122"/>
+                <a:cs typeface="Consolas" pitchFamily="34" charset="-120"/>
+              </a:rPr>
+              <a:t>‹code›  </a:t>
+            </a:r>
+            <a:pPr indent="0" marL="0">
+              <a:buNone/>
+            </a:pPr>
+            <a:r>
+              <a:rPr lang="en-US" sz="900" dirty="0">
+                <a:solidFill>
+                  <a:srgbClr val="6B7280"/>
+                </a:solidFill>
+                <a:latin typeface="Consolas" pitchFamily="34" charset="0"/>
+                <a:ea typeface="Consolas" pitchFamily="34" charset="-122"/>
+                <a:cs typeface="Consolas" pitchFamily="34" charset="-120"/>
+              </a:rPr>
+              <a:t>5 層分類學 docs/evolution_design_notes.md §3 ｜ 落地 src/tools/{interaction_tool_wrapper,retrieval_executor,tool_loader}.py</a:t>
+            </a:r>
+            <a:endParaRPr lang="en-US" sz="900" dirty="0"/>
           </a:p>
         </p:txBody>
       </p:sp>
@@ -6673,7 +6991,7 @@
         </p:nvSpPr>
         <p:spPr>
           <a:xfrm>
-            <a:off x="548640" y="5212080"/>
+            <a:off x="548640" y="5120640"/>
             <a:ext cx="11109960" cy="1234440"/>
           </a:xfrm>
           <a:prstGeom prst="rect">
@@ -6705,7 +7023,7 @@
         </p:nvSpPr>
         <p:spPr>
           <a:xfrm>
-            <a:off x="868680" y="5212080"/>
+            <a:off x="868680" y="5120640"/>
             <a:ext cx="10515600" cy="1234440"/>
           </a:xfrm>
           <a:prstGeom prst="rect">
@@ -6733,6 +7051,59 @@
               <a:t>“ 分數健康 ≠ 功能正確 ”　AI 的誠實性，是協作的地基。</a:t>
             </a:r>
             <a:endParaRPr lang="en-US" sz="2200" dirty="0"/>
+          </a:p>
+        </p:txBody>
+      </p:sp>
+      <p:sp>
+        <p:nvSpPr>
+          <p:cNvPr id="14" name="Text 12"/>
+          <p:cNvSpPr/>
+          <p:nvPr/>
+        </p:nvSpPr>
+        <p:spPr>
+          <a:xfrm>
+            <a:off x="502920" y="6583680"/>
+            <a:ext cx="11338560" cy="201168"/>
+          </a:xfrm>
+          <a:prstGeom prst="rect">
+            <a:avLst/>
+          </a:prstGeom>
+          <a:noFill/>
+          <a:ln/>
+        </p:spPr>
+        <p:txBody>
+          <a:bodyPr wrap="square" lIns="0" tIns="0" rIns="0" bIns="0" rtlCol="0" anchor="ctr"/>
+          <a:lstStyle/>
+          <a:p>
+            <a:pPr indent="0" marL="0">
+              <a:buNone/>
+            </a:pPr>
+            <a:r>
+              <a:rPr lang="en-US" sz="900" b="1" dirty="0">
+                <a:solidFill>
+                  <a:srgbClr val="E8A33D"/>
+                </a:solidFill>
+                <a:latin typeface="Consolas" pitchFamily="34" charset="0"/>
+                <a:ea typeface="Consolas" pitchFamily="34" charset="-122"/>
+                <a:cs typeface="Consolas" pitchFamily="34" charset="-120"/>
+              </a:rPr>
+              <a:t>‹code›  </a:t>
+            </a:r>
+            <a:pPr indent="0" marL="0">
+              <a:buNone/>
+            </a:pPr>
+            <a:r>
+              <a:rPr lang="en-US" sz="900" dirty="0">
+                <a:solidFill>
+                  <a:srgbClr val="6B7280"/>
+                </a:solidFill>
+                <a:latin typeface="Consolas" pitchFamily="34" charset="0"/>
+                <a:ea typeface="Consolas" pitchFamily="34" charset="-122"/>
+                <a:cs typeface="Consolas" pitchFamily="34" charset="-120"/>
+              </a:rPr>
+              <a:t>成因 simulation_crew.py:21-30 graceful [] 蓋住失敗 · 修正 tool_loader.py:164 · 回歸測試 tests/test_tool_loader.py:185-203</a:t>
+            </a:r>
+            <a:endParaRPr lang="en-US" sz="900" dirty="0"/>
           </a:p>
         </p:txBody>
       </p:sp>
@@ -7490,6 +7861,59 @@
           </a:p>
         </p:txBody>
       </p:sp>
+      <p:sp>
+        <p:nvSpPr>
+          <p:cNvPr id="25" name="Text 23"/>
+          <p:cNvSpPr/>
+          <p:nvPr/>
+        </p:nvSpPr>
+        <p:spPr>
+          <a:xfrm>
+            <a:off x="502920" y="6583680"/>
+            <a:ext cx="11338560" cy="201168"/>
+          </a:xfrm>
+          <a:prstGeom prst="rect">
+            <a:avLst/>
+          </a:prstGeom>
+          <a:noFill/>
+          <a:ln/>
+        </p:spPr>
+        <p:txBody>
+          <a:bodyPr wrap="square" lIns="0" tIns="0" rIns="0" bIns="0" rtlCol="0" anchor="ctr"/>
+          <a:lstStyle/>
+          <a:p>
+            <a:pPr indent="0" marL="0">
+              <a:buNone/>
+            </a:pPr>
+            <a:r>
+              <a:rPr lang="en-US" sz="900" b="1" dirty="0">
+                <a:solidFill>
+                  <a:srgbClr val="E8A33D"/>
+                </a:solidFill>
+                <a:latin typeface="Consolas" pitchFamily="34" charset="0"/>
+                <a:ea typeface="Consolas" pitchFamily="34" charset="-122"/>
+                <a:cs typeface="Consolas" pitchFamily="34" charset="-120"/>
+              </a:rPr>
+              <a:t>‹code›  </a:t>
+            </a:r>
+            <a:pPr indent="0" marL="0">
+              <a:buNone/>
+            </a:pPr>
+            <a:r>
+              <a:rPr lang="en-US" sz="900" dirty="0">
+                <a:solidFill>
+                  <a:srgbClr val="6B7280"/>
+                </a:solidFill>
+                <a:latin typeface="Consolas" pitchFamily="34" charset="0"/>
+                <a:ea typeface="Consolas" pitchFamily="34" charset="-122"/>
+                <a:cs typeface="Consolas" pitchFamily="34" charset="-120"/>
+              </a:rPr>
+              <a:t>原則寫在 CLAUDE.md「Git 工作流程」(main 只接受 PR merge，不直接 commit)</a:t>
+            </a:r>
+            <a:endParaRPr lang="en-US" sz="900" dirty="0"/>
+          </a:p>
+        </p:txBody>
+      </p:sp>
     </p:spTree>
   </p:cSld>
   <p:clrMapOvr>
@@ -7885,6 +8309,59 @@
           </a:p>
         </p:txBody>
       </p:sp>
+      <p:sp>
+        <p:nvSpPr>
+          <p:cNvPr id="12" name="Text 10"/>
+          <p:cNvSpPr/>
+          <p:nvPr/>
+        </p:nvSpPr>
+        <p:spPr>
+          <a:xfrm>
+            <a:off x="502920" y="6583680"/>
+            <a:ext cx="11338560" cy="201168"/>
+          </a:xfrm>
+          <a:prstGeom prst="rect">
+            <a:avLst/>
+          </a:prstGeom>
+          <a:noFill/>
+          <a:ln/>
+        </p:spPr>
+        <p:txBody>
+          <a:bodyPr wrap="square" lIns="0" tIns="0" rIns="0" bIns="0" rtlCol="0" anchor="ctr"/>
+          <a:lstStyle/>
+          <a:p>
+            <a:pPr indent="0" marL="0">
+              <a:buNone/>
+            </a:pPr>
+            <a:r>
+              <a:rPr lang="en-US" sz="900" b="1" dirty="0">
+                <a:solidFill>
+                  <a:srgbClr val="E8A33D"/>
+                </a:solidFill>
+                <a:latin typeface="Consolas" pitchFamily="34" charset="0"/>
+                <a:ea typeface="Consolas" pitchFamily="34" charset="-122"/>
+                <a:cs typeface="Consolas" pitchFamily="34" charset="-120"/>
+              </a:rPr>
+              <a:t>‹code›  </a:t>
+            </a:r>
+            <a:pPr indent="0" marL="0">
+              <a:buNone/>
+            </a:pPr>
+            <a:r>
+              <a:rPr lang="en-US" sz="900" dirty="0">
+                <a:solidFill>
+                  <a:srgbClr val="6B7280"/>
+                </a:solidFill>
+                <a:latin typeface="Consolas" pitchFamily="34" charset="0"/>
+                <a:ea typeface="Consolas" pitchFamily="34" charset="-122"/>
+                <a:cs typeface="Consolas" pitchFamily="34" charset="-120"/>
+              </a:rPr>
+              <a:t>完整 50-iter 怎麼跑完：docs/evolution_design_notes.md §12.7(b)（nohup 脫離 harness + caffeinate -i -s）</a:t>
+            </a:r>
+            <a:endParaRPr lang="en-US" sz="900" dirty="0"/>
+          </a:p>
+        </p:txBody>
+      </p:sp>
     </p:spTree>
   </p:cSld>
   <p:clrMapOvr>
@@ -8353,6 +8830,59 @@
           </a:p>
         </p:txBody>
       </p:sp>
+      <p:sp>
+        <p:nvSpPr>
+          <p:cNvPr id="13" name="Text 11"/>
+          <p:cNvSpPr/>
+          <p:nvPr/>
+        </p:nvSpPr>
+        <p:spPr>
+          <a:xfrm>
+            <a:off x="502920" y="6583680"/>
+            <a:ext cx="11338560" cy="201168"/>
+          </a:xfrm>
+          <a:prstGeom prst="rect">
+            <a:avLst/>
+          </a:prstGeom>
+          <a:noFill/>
+          <a:ln/>
+        </p:spPr>
+        <p:txBody>
+          <a:bodyPr wrap="square" lIns="0" tIns="0" rIns="0" bIns="0" rtlCol="0" anchor="ctr"/>
+          <a:lstStyle/>
+          <a:p>
+            <a:pPr indent="0" marL="0">
+              <a:buNone/>
+            </a:pPr>
+            <a:r>
+              <a:rPr lang="en-US" sz="900" b="1" dirty="0">
+                <a:solidFill>
+                  <a:srgbClr val="E8A33D"/>
+                </a:solidFill>
+                <a:latin typeface="Consolas" pitchFamily="34" charset="0"/>
+                <a:ea typeface="Consolas" pitchFamily="34" charset="-122"/>
+                <a:cs typeface="Consolas" pitchFamily="34" charset="-120"/>
+              </a:rPr>
+              <a:t>‹code›  </a:t>
+            </a:r>
+            <a:pPr indent="0" marL="0">
+              <a:buNone/>
+            </a:pPr>
+            <a:r>
+              <a:rPr lang="en-US" sz="900" dirty="0">
+                <a:solidFill>
+                  <a:srgbClr val="6B7280"/>
+                </a:solidFill>
+                <a:latin typeface="Consolas" pitchFamily="34" charset="0"/>
+                <a:ea typeface="Consolas" pitchFamily="34" charset="-122"/>
+                <a:cs typeface="Consolas" pitchFamily="34" charset="-120"/>
+              </a:rPr>
+              <a:t>三層護欄：interaction_tool_wrapper.py(L0) · retrieval_executor.py(L1) · tool_loader.py(L2)｜數據 §12.7</a:t>
+            </a:r>
+            <a:endParaRPr lang="en-US" sz="900" dirty="0"/>
+          </a:p>
+        </p:txBody>
+      </p:sp>
     </p:spTree>
   </p:cSld>
   <p:clrMapOvr>
@@ -9336,8 +9866,8 @@
         </p:nvSpPr>
         <p:spPr>
           <a:xfrm>
-            <a:off x="548640" y="6263640"/>
-            <a:ext cx="10972800" cy="365760"/>
+            <a:off x="548640" y="6199632"/>
+            <a:ext cx="10972800" cy="274320"/>
           </a:xfrm>
           <a:prstGeom prst="rect">
             <a:avLst/>
@@ -9364,6 +9894,59 @@
               <a:t>💬 哪一個模式，你明天就能用在自己的專案？</a:t>
             </a:r>
             <a:endParaRPr lang="en-US" sz="1400" dirty="0"/>
+          </a:p>
+        </p:txBody>
+      </p:sp>
+      <p:sp>
+        <p:nvSpPr>
+          <p:cNvPr id="31" name="Text 29"/>
+          <p:cNvSpPr/>
+          <p:nvPr/>
+        </p:nvSpPr>
+        <p:spPr>
+          <a:xfrm>
+            <a:off x="502920" y="6583680"/>
+            <a:ext cx="11338560" cy="201168"/>
+          </a:xfrm>
+          <a:prstGeom prst="rect">
+            <a:avLst/>
+          </a:prstGeom>
+          <a:noFill/>
+          <a:ln/>
+        </p:spPr>
+        <p:txBody>
+          <a:bodyPr wrap="square" lIns="0" tIns="0" rIns="0" bIns="0" rtlCol="0" anchor="ctr"/>
+          <a:lstStyle/>
+          <a:p>
+            <a:pPr indent="0" marL="0">
+              <a:buNone/>
+            </a:pPr>
+            <a:r>
+              <a:rPr lang="en-US" sz="900" b="1" dirty="0">
+                <a:solidFill>
+                  <a:srgbClr val="E8A33D"/>
+                </a:solidFill>
+                <a:latin typeface="Consolas" pitchFamily="34" charset="0"/>
+                <a:ea typeface="Consolas" pitchFamily="34" charset="-122"/>
+                <a:cs typeface="Consolas" pitchFamily="34" charset="-120"/>
+              </a:rPr>
+              <a:t>‹code›  </a:t>
+            </a:r>
+            <a:pPr indent="0" marL="0">
+              <a:buNone/>
+            </a:pPr>
+            <a:r>
+              <a:rPr lang="en-US" sz="900" dirty="0">
+                <a:solidFill>
+                  <a:srgbClr val="6B7280"/>
+                </a:solidFill>
+                <a:latin typeface="Consolas" pitchFamily="34" charset="0"/>
+                <a:ea typeface="Consolas" pitchFamily="34" charset="-122"/>
+                <a:cs typeface="Consolas" pitchFamily="34" charset="-120"/>
+              </a:rPr>
+              <a:t>五模式完整版見 docs/collaboration_workflow_outline.md（Part 3）</a:t>
+            </a:r>
+            <a:endParaRPr lang="en-US" sz="900" dirty="0"/>
           </a:p>
         </p:txBody>
       </p:sp>
@@ -9686,6 +10269,59 @@
           </a:p>
         </p:txBody>
       </p:sp>
+      <p:sp>
+        <p:nvSpPr>
+          <p:cNvPr id="9" name="Text 7"/>
+          <p:cNvSpPr/>
+          <p:nvPr/>
+        </p:nvSpPr>
+        <p:spPr>
+          <a:xfrm>
+            <a:off x="502920" y="6583680"/>
+            <a:ext cx="11338560" cy="201168"/>
+          </a:xfrm>
+          <a:prstGeom prst="rect">
+            <a:avLst/>
+          </a:prstGeom>
+          <a:noFill/>
+          <a:ln/>
+        </p:spPr>
+        <p:txBody>
+          <a:bodyPr wrap="square" lIns="0" tIns="0" rIns="0" bIns="0" rtlCol="0" anchor="ctr"/>
+          <a:lstStyle/>
+          <a:p>
+            <a:pPr indent="0" marL="0">
+              <a:buNone/>
+            </a:pPr>
+            <a:r>
+              <a:rPr lang="en-US" sz="900" b="1" dirty="0">
+                <a:solidFill>
+                  <a:srgbClr val="E8A33D"/>
+                </a:solidFill>
+                <a:latin typeface="Consolas" pitchFamily="34" charset="0"/>
+                <a:ea typeface="Consolas" pitchFamily="34" charset="-122"/>
+                <a:cs typeface="Consolas" pitchFamily="34" charset="-120"/>
+              </a:rPr>
+              <a:t>‹code›  </a:t>
+            </a:r>
+            <a:pPr indent="0" marL="0">
+              <a:buNone/>
+            </a:pPr>
+            <a:r>
+              <a:rPr lang="en-US" sz="900" dirty="0">
+                <a:solidFill>
+                  <a:srgbClr val="6B7280"/>
+                </a:solidFill>
+                <a:latin typeface="Consolas" pitchFamily="34" charset="0"/>
+                <a:ea typeface="Consolas" pitchFamily="34" charset="-122"/>
+                <a:cs typeface="Consolas" pitchFamily="34" charset="-120"/>
+              </a:rPr>
+              <a:t>三個智能體：我（決策）· Claude（src/ 實作）· OpenEvolve（evolvable_tools.py:18 EVOLVE-BLOCK 內突變）</a:t>
+            </a:r>
+            <a:endParaRPr lang="en-US" sz="900" dirty="0"/>
+          </a:p>
+        </p:txBody>
+      </p:sp>
     </p:spTree>
   </p:cSld>
   <p:clrMapOvr>
@@ -10428,6 +11064,59 @@
           </a:p>
         </p:txBody>
       </p:sp>
+      <p:sp>
+        <p:nvSpPr>
+          <p:cNvPr id="20" name="Text 18"/>
+          <p:cNvSpPr/>
+          <p:nvPr/>
+        </p:nvSpPr>
+        <p:spPr>
+          <a:xfrm>
+            <a:off x="502920" y="6583680"/>
+            <a:ext cx="11338560" cy="201168"/>
+          </a:xfrm>
+          <a:prstGeom prst="rect">
+            <a:avLst/>
+          </a:prstGeom>
+          <a:noFill/>
+          <a:ln/>
+        </p:spPr>
+        <p:txBody>
+          <a:bodyPr wrap="square" lIns="0" tIns="0" rIns="0" bIns="0" rtlCol="0" anchor="ctr"/>
+          <a:lstStyle/>
+          <a:p>
+            <a:pPr indent="0" marL="0">
+              <a:buNone/>
+            </a:pPr>
+            <a:r>
+              <a:rPr lang="en-US" sz="900" b="1" dirty="0">
+                <a:solidFill>
+                  <a:srgbClr val="E8A33D"/>
+                </a:solidFill>
+                <a:latin typeface="Consolas" pitchFamily="34" charset="0"/>
+                <a:ea typeface="Consolas" pitchFamily="34" charset="-122"/>
+                <a:cs typeface="Consolas" pitchFamily="34" charset="-120"/>
+              </a:rPr>
+              <a:t>‹code›  </a:t>
+            </a:r>
+            <a:pPr indent="0" marL="0">
+              <a:buNone/>
+            </a:pPr>
+            <a:r>
+              <a:rPr lang="en-US" sz="900" dirty="0">
+                <a:solidFill>
+                  <a:srgbClr val="6B7280"/>
+                </a:solidFill>
+                <a:latin typeface="Consolas" pitchFamily="34" charset="0"/>
+                <a:ea typeface="Consolas" pitchFamily="34" charset="-122"/>
+                <a:cs typeface="Consolas" pitchFamily="34" charset="-120"/>
+              </a:rPr>
+              <a:t>進化目標檔 config/agents_evolving.yaml EVOLVE-BLOCK · iter22 數據 docs/evolution_design_notes.md §12.7(b)</a:t>
+            </a:r>
+            <a:endParaRPr lang="en-US" sz="900" dirty="0"/>
+          </a:p>
+        </p:txBody>
+      </p:sp>
     </p:spTree>
   </p:cSld>
   <p:clrMapOvr>
@@ -10858,6 +11547,59 @@
           </a:p>
         </p:txBody>
       </p:sp>
+      <p:sp>
+        <p:nvSpPr>
+          <p:cNvPr id="14" name="Text 12"/>
+          <p:cNvSpPr/>
+          <p:nvPr/>
+        </p:nvSpPr>
+        <p:spPr>
+          <a:xfrm>
+            <a:off x="502920" y="6583680"/>
+            <a:ext cx="11338560" cy="201168"/>
+          </a:xfrm>
+          <a:prstGeom prst="rect">
+            <a:avLst/>
+          </a:prstGeom>
+          <a:noFill/>
+          <a:ln/>
+        </p:spPr>
+        <p:txBody>
+          <a:bodyPr wrap="square" lIns="0" tIns="0" rIns="0" bIns="0" rtlCol="0" anchor="ctr"/>
+          <a:lstStyle/>
+          <a:p>
+            <a:pPr indent="0" marL="0">
+              <a:buNone/>
+            </a:pPr>
+            <a:r>
+              <a:rPr lang="en-US" sz="900" b="1" dirty="0">
+                <a:solidFill>
+                  <a:srgbClr val="E8A33D"/>
+                </a:solidFill>
+                <a:latin typeface="Consolas" pitchFamily="34" charset="0"/>
+                <a:ea typeface="Consolas" pitchFamily="34" charset="-122"/>
+                <a:cs typeface="Consolas" pitchFamily="34" charset="-120"/>
+              </a:rPr>
+              <a:t>‹code›  </a:t>
+            </a:r>
+            <a:pPr indent="0" marL="0">
+              <a:buNone/>
+            </a:pPr>
+            <a:r>
+              <a:rPr lang="en-US" sz="900" dirty="0">
+                <a:solidFill>
+                  <a:srgbClr val="8FA3C8"/>
+                </a:solidFill>
+                <a:latin typeface="Consolas" pitchFamily="34" charset="0"/>
+                <a:ea typeface="Consolas" pitchFamily="34" charset="-122"/>
+                <a:cs typeface="Consolas" pitchFamily="34" charset="-120"/>
+              </a:rPr>
+              <a:t>三層協作數據 docs/evolution_design_notes.md §12.7（baseline 0.72 → best 0.842，崩潰率 16%）</a:t>
+            </a:r>
+            <a:endParaRPr lang="en-US" sz="900" dirty="0"/>
+          </a:p>
+        </p:txBody>
+      </p:sp>
     </p:spTree>
   </p:cSld>
   <p:clrMapOvr>
@@ -11508,6 +12250,59 @@
           </a:p>
         </p:txBody>
       </p:sp>
+      <p:sp>
+        <p:nvSpPr>
+          <p:cNvPr id="20" name="Text 18"/>
+          <p:cNvSpPr/>
+          <p:nvPr/>
+        </p:nvSpPr>
+        <p:spPr>
+          <a:xfrm>
+            <a:off x="502920" y="6583680"/>
+            <a:ext cx="11338560" cy="201168"/>
+          </a:xfrm>
+          <a:prstGeom prst="rect">
+            <a:avLst/>
+          </a:prstGeom>
+          <a:noFill/>
+          <a:ln/>
+        </p:spPr>
+        <p:txBody>
+          <a:bodyPr wrap="square" lIns="0" tIns="0" rIns="0" bIns="0" rtlCol="0" anchor="ctr"/>
+          <a:lstStyle/>
+          <a:p>
+            <a:pPr indent="0" marL="0">
+              <a:buNone/>
+            </a:pPr>
+            <a:r>
+              <a:rPr lang="en-US" sz="900" b="1" dirty="0">
+                <a:solidFill>
+                  <a:srgbClr val="E8A33D"/>
+                </a:solidFill>
+                <a:latin typeface="Consolas" pitchFamily="34" charset="0"/>
+                <a:ea typeface="Consolas" pitchFamily="34" charset="-122"/>
+                <a:cs typeface="Consolas" pitchFamily="34" charset="-120"/>
+              </a:rPr>
+              <a:t>‹code›  </a:t>
+            </a:r>
+            <a:pPr indent="0" marL="0">
+              <a:buNone/>
+            </a:pPr>
+            <a:r>
+              <a:rPr lang="en-US" sz="900" dirty="0">
+                <a:solidFill>
+                  <a:srgbClr val="6B7280"/>
+                </a:solidFill>
+                <a:latin typeface="Consolas" pitchFamily="34" charset="0"/>
+                <a:ea typeface="Consolas" pitchFamily="34" charset="-122"/>
+                <a:cs typeface="Consolas" pitchFamily="34" charset="-120"/>
+              </a:rPr>
+              <a:t>島/遷移設定 config/openevolve_config.yaml:71-78（num_islands:3, migration_interval/rate）· 數據 §12.7(b)</a:t>
+            </a:r>
+            <a:endParaRPr lang="en-US" sz="900" dirty="0"/>
+          </a:p>
+        </p:txBody>
+      </p:sp>
     </p:spTree>
   </p:cSld>
   <p:clrMapOvr>
@@ -11926,6 +12721,59 @@
           </a:p>
         </p:txBody>
       </p:sp>
+      <p:sp>
+        <p:nvSpPr>
+          <p:cNvPr id="11" name="Text 9"/>
+          <p:cNvSpPr/>
+          <p:nvPr/>
+        </p:nvSpPr>
+        <p:spPr>
+          <a:xfrm>
+            <a:off x="502920" y="6583680"/>
+            <a:ext cx="11338560" cy="201168"/>
+          </a:xfrm>
+          <a:prstGeom prst="rect">
+            <a:avLst/>
+          </a:prstGeom>
+          <a:noFill/>
+          <a:ln/>
+        </p:spPr>
+        <p:txBody>
+          <a:bodyPr wrap="square" lIns="0" tIns="0" rIns="0" bIns="0" rtlCol="0" anchor="ctr"/>
+          <a:lstStyle/>
+          <a:p>
+            <a:pPr indent="0" marL="0">
+              <a:buNone/>
+            </a:pPr>
+            <a:r>
+              <a:rPr lang="en-US" sz="900" b="1" dirty="0">
+                <a:solidFill>
+                  <a:srgbClr val="E8A33D"/>
+                </a:solidFill>
+                <a:latin typeface="Consolas" pitchFamily="34" charset="0"/>
+                <a:ea typeface="Consolas" pitchFamily="34" charset="-122"/>
+                <a:cs typeface="Consolas" pitchFamily="34" charset="-120"/>
+              </a:rPr>
+              <a:t>‹code›  </a:t>
+            </a:r>
+            <a:pPr indent="0" marL="0">
+              <a:buNone/>
+            </a:pPr>
+            <a:r>
+              <a:rPr lang="en-US" sz="900" dirty="0">
+                <a:solidFill>
+                  <a:srgbClr val="6B7280"/>
+                </a:solidFill>
+                <a:latin typeface="Consolas" pitchFamily="34" charset="0"/>
+                <a:ea typeface="Consolas" pitchFamily="34" charset="-122"/>
+                <a:cs typeface="Consolas" pitchFamily="34" charset="-120"/>
+              </a:rPr>
+              <a:t>8/50 低分歸因 docs/evolution_design_notes.md §12.7(b) · diff_based_evolution:false（full-rewrite）見 openevolve_config.yaml:18</a:t>
+            </a:r>
+            <a:endParaRPr lang="en-US" sz="900" dirty="0"/>
+          </a:p>
+        </p:txBody>
+      </p:sp>
     </p:spTree>
   </p:cSld>
   <p:clrMapOvr>
@@ -12554,6 +13402,59 @@
           </a:p>
         </p:txBody>
       </p:sp>
+      <p:sp>
+        <p:nvSpPr>
+          <p:cNvPr id="18" name="Text 16"/>
+          <p:cNvSpPr/>
+          <p:nvPr/>
+        </p:nvSpPr>
+        <p:spPr>
+          <a:xfrm>
+            <a:off x="502920" y="6583680"/>
+            <a:ext cx="11338560" cy="201168"/>
+          </a:xfrm>
+          <a:prstGeom prst="rect">
+            <a:avLst/>
+          </a:prstGeom>
+          <a:noFill/>
+          <a:ln/>
+        </p:spPr>
+        <p:txBody>
+          <a:bodyPr wrap="square" lIns="0" tIns="0" rIns="0" bIns="0" rtlCol="0" anchor="ctr"/>
+          <a:lstStyle/>
+          <a:p>
+            <a:pPr indent="0" marL="0">
+              <a:buNone/>
+            </a:pPr>
+            <a:r>
+              <a:rPr lang="en-US" sz="900" b="1" dirty="0">
+                <a:solidFill>
+                  <a:srgbClr val="E8A33D"/>
+                </a:solidFill>
+                <a:latin typeface="Consolas" pitchFamily="34" charset="0"/>
+                <a:ea typeface="Consolas" pitchFamily="34" charset="-122"/>
+                <a:cs typeface="Consolas" pitchFamily="34" charset="-120"/>
+              </a:rPr>
+              <a:t>‹code›  </a:t>
+            </a:r>
+            <a:pPr indent="0" marL="0">
+              <a:buNone/>
+            </a:pPr>
+            <a:r>
+              <a:rPr lang="en-US" sz="900" dirty="0">
+                <a:solidFill>
+                  <a:srgbClr val="6B7280"/>
+                </a:solidFill>
+                <a:latin typeface="Consolas" pitchFamily="34" charset="0"/>
+                <a:ea typeface="Consolas" pitchFamily="34" charset="-122"/>
+                <a:cs typeface="Consolas" pitchFamily="34" charset="-120"/>
+              </a:rPr>
+              <a:t>對應檔案：我→config/*.yaml ｜ Claude→src/ + tests/ ｜ 進化→EVOLVE-BLOCK（agents_evolving.yaml / evolvable_tools.py）</a:t>
+            </a:r>
+            <a:endParaRPr lang="en-US" sz="900" dirty="0"/>
+          </a:p>
+        </p:txBody>
+      </p:sp>
     </p:spTree>
   </p:cSld>
   <p:clrMapOvr>
@@ -12693,7 +13594,7 @@
         <p:spPr>
           <a:xfrm>
             <a:off x="548640" y="1828800"/>
-            <a:ext cx="11109960" cy="914400"/>
+            <a:ext cx="11109960" cy="868680"/>
           </a:xfrm>
           <a:prstGeom prst="rect">
             <a:avLst/>
@@ -12724,7 +13625,7 @@
         </p:nvSpPr>
         <p:spPr>
           <a:xfrm>
-            <a:off x="822960" y="2057400"/>
+            <a:off x="822960" y="2029968"/>
             <a:ext cx="457200" cy="457200"/>
           </a:xfrm>
           <a:prstGeom prst="ellipse">
@@ -12744,7 +13645,7 @@
         </p:nvSpPr>
         <p:spPr>
           <a:xfrm>
-            <a:off x="822960" y="2057400"/>
+            <a:off x="822960" y="2029968"/>
             <a:ext cx="457200" cy="457200"/>
           </a:xfrm>
           <a:prstGeom prst="rect">
@@ -12784,7 +13685,7 @@
         <p:spPr>
           <a:xfrm>
             <a:off x="1463040" y="1828800"/>
-            <a:ext cx="10058400" cy="914400"/>
+            <a:ext cx="10058400" cy="868680"/>
           </a:xfrm>
           <a:prstGeom prst="rect">
             <a:avLst/>
@@ -12822,8 +13723,8 @@
         </p:nvSpPr>
         <p:spPr>
           <a:xfrm>
-            <a:off x="548640" y="2880360"/>
-            <a:ext cx="11109960" cy="914400"/>
+            <a:off x="548640" y="2834640"/>
+            <a:ext cx="11109960" cy="868680"/>
           </a:xfrm>
           <a:prstGeom prst="rect">
             <a:avLst/>
@@ -12854,7 +13755,7 @@
         </p:nvSpPr>
         <p:spPr>
           <a:xfrm>
-            <a:off x="822960" y="3108960"/>
+            <a:off x="822960" y="3035808"/>
             <a:ext cx="457200" cy="457200"/>
           </a:xfrm>
           <a:prstGeom prst="ellipse">
@@ -12874,7 +13775,7 @@
         </p:nvSpPr>
         <p:spPr>
           <a:xfrm>
-            <a:off x="822960" y="3108960"/>
+            <a:off x="822960" y="3035808"/>
             <a:ext cx="457200" cy="457200"/>
           </a:xfrm>
           <a:prstGeom prst="rect">
@@ -12913,8 +13814,8 @@
         </p:nvSpPr>
         <p:spPr>
           <a:xfrm>
-            <a:off x="1463040" y="2880360"/>
-            <a:ext cx="10058400" cy="914400"/>
+            <a:off x="1463040" y="2834640"/>
+            <a:ext cx="10058400" cy="868680"/>
           </a:xfrm>
           <a:prstGeom prst="rect">
             <a:avLst/>
@@ -12952,8 +13853,8 @@
         </p:nvSpPr>
         <p:spPr>
           <a:xfrm>
-            <a:off x="548640" y="3931920"/>
-            <a:ext cx="11109960" cy="914400"/>
+            <a:off x="548640" y="3840480"/>
+            <a:ext cx="11109960" cy="868680"/>
           </a:xfrm>
           <a:prstGeom prst="rect">
             <a:avLst/>
@@ -12984,7 +13885,7 @@
         </p:nvSpPr>
         <p:spPr>
           <a:xfrm>
-            <a:off x="822960" y="4160520"/>
+            <a:off x="822960" y="4041648"/>
             <a:ext cx="457200" cy="457200"/>
           </a:xfrm>
           <a:prstGeom prst="ellipse">
@@ -13004,7 +13905,7 @@
         </p:nvSpPr>
         <p:spPr>
           <a:xfrm>
-            <a:off x="822960" y="4160520"/>
+            <a:off x="822960" y="4041648"/>
             <a:ext cx="457200" cy="457200"/>
           </a:xfrm>
           <a:prstGeom prst="rect">
@@ -13043,8 +13944,8 @@
         </p:nvSpPr>
         <p:spPr>
           <a:xfrm>
-            <a:off x="1463040" y="3931920"/>
-            <a:ext cx="10058400" cy="914400"/>
+            <a:off x="1463040" y="3840480"/>
+            <a:ext cx="10058400" cy="868680"/>
           </a:xfrm>
           <a:prstGeom prst="rect">
             <a:avLst/>
@@ -13082,8 +13983,8 @@
         </p:nvSpPr>
         <p:spPr>
           <a:xfrm>
-            <a:off x="548640" y="4983480"/>
-            <a:ext cx="11109960" cy="914400"/>
+            <a:off x="548640" y="4846320"/>
+            <a:ext cx="11109960" cy="868680"/>
           </a:xfrm>
           <a:prstGeom prst="rect">
             <a:avLst/>
@@ -13114,7 +14015,7 @@
         </p:nvSpPr>
         <p:spPr>
           <a:xfrm>
-            <a:off x="822960" y="5212080"/>
+            <a:off x="822960" y="5047488"/>
             <a:ext cx="457200" cy="457200"/>
           </a:xfrm>
           <a:prstGeom prst="ellipse">
@@ -13134,7 +14035,7 @@
         </p:nvSpPr>
         <p:spPr>
           <a:xfrm>
-            <a:off x="822960" y="5212080"/>
+            <a:off x="822960" y="5047488"/>
             <a:ext cx="457200" cy="457200"/>
           </a:xfrm>
           <a:prstGeom prst="rect">
@@ -13173,8 +14074,8 @@
         </p:nvSpPr>
         <p:spPr>
           <a:xfrm>
-            <a:off x="1463040" y="4983480"/>
-            <a:ext cx="10058400" cy="914400"/>
+            <a:off x="1463040" y="4846320"/>
+            <a:ext cx="10058400" cy="868680"/>
           </a:xfrm>
           <a:prstGeom prst="rect">
             <a:avLst/>
@@ -13212,8 +14113,8 @@
         </p:nvSpPr>
         <p:spPr>
           <a:xfrm>
-            <a:off x="548640" y="6172200"/>
-            <a:ext cx="10972800" cy="365760"/>
+            <a:off x="548640" y="6035040"/>
+            <a:ext cx="10972800" cy="320040"/>
           </a:xfrm>
           <a:prstGeom prst="rect">
             <a:avLst/>
@@ -13240,6 +14141,59 @@
               <a:t>💬 回到開場：你的 AI 是工具，還是夥伴？</a:t>
             </a:r>
             <a:endParaRPr lang="en-US" sz="1400" dirty="0"/>
+          </a:p>
+        </p:txBody>
+      </p:sp>
+      <p:sp>
+        <p:nvSpPr>
+          <p:cNvPr id="22" name="Text 20"/>
+          <p:cNvSpPr/>
+          <p:nvPr/>
+        </p:nvSpPr>
+        <p:spPr>
+          <a:xfrm>
+            <a:off x="502920" y="6583680"/>
+            <a:ext cx="11338560" cy="201168"/>
+          </a:xfrm>
+          <a:prstGeom prst="rect">
+            <a:avLst/>
+          </a:prstGeom>
+          <a:noFill/>
+          <a:ln/>
+        </p:spPr>
+        <p:txBody>
+          <a:bodyPr wrap="square" lIns="0" tIns="0" rIns="0" bIns="0" rtlCol="0" anchor="ctr"/>
+          <a:lstStyle/>
+          <a:p>
+            <a:pPr indent="0" marL="0">
+              <a:buNone/>
+            </a:pPr>
+            <a:r>
+              <a:rPr lang="en-US" sz="900" b="1" dirty="0">
+                <a:solidFill>
+                  <a:srgbClr val="E8A33D"/>
+                </a:solidFill>
+                <a:latin typeface="Consolas" pitchFamily="34" charset="0"/>
+                <a:ea typeface="Consolas" pitchFamily="34" charset="-122"/>
+                <a:cs typeface="Consolas" pitchFamily="34" charset="-120"/>
+              </a:rPr>
+              <a:t>‹code›  </a:t>
+            </a:r>
+            <a:pPr indent="0" marL="0">
+              <a:buNone/>
+            </a:pPr>
+            <a:r>
+              <a:rPr lang="en-US" sz="900" dirty="0">
+                <a:solidFill>
+                  <a:srgbClr val="6B7280"/>
+                </a:solidFill>
+                <a:latin typeface="Consolas" pitchFamily="34" charset="0"/>
+                <a:ea typeface="Consolas" pitchFamily="34" charset="-122"/>
+                <a:cs typeface="Consolas" pitchFamily="34" charset="-120"/>
+              </a:rPr>
+              <a:t>原則出處 docs/evolution_design_notes.md §3（分類學）· §4（協議/策略分離）· §12.7（數據）</a:t>
+            </a:r>
+            <a:endParaRPr lang="en-US" sz="900" dirty="0"/>
           </a:p>
         </p:txBody>
       </p:sp>
@@ -13710,6 +14664,59 @@
           </a:p>
         </p:txBody>
       </p:sp>
+      <p:sp>
+        <p:nvSpPr>
+          <p:cNvPr id="14" name="Text 12"/>
+          <p:cNvSpPr/>
+          <p:nvPr/>
+        </p:nvSpPr>
+        <p:spPr>
+          <a:xfrm>
+            <a:off x="502920" y="6583680"/>
+            <a:ext cx="11338560" cy="201168"/>
+          </a:xfrm>
+          <a:prstGeom prst="rect">
+            <a:avLst/>
+          </a:prstGeom>
+          <a:noFill/>
+          <a:ln/>
+        </p:spPr>
+        <p:txBody>
+          <a:bodyPr wrap="square" lIns="0" tIns="0" rIns="0" bIns="0" rtlCol="0" anchor="ctr"/>
+          <a:lstStyle/>
+          <a:p>
+            <a:pPr indent="0" marL="0">
+              <a:buNone/>
+            </a:pPr>
+            <a:r>
+              <a:rPr lang="en-US" sz="900" b="1" dirty="0">
+                <a:solidFill>
+                  <a:srgbClr val="E8A33D"/>
+                </a:solidFill>
+                <a:latin typeface="Consolas" pitchFamily="34" charset="0"/>
+                <a:ea typeface="Consolas" pitchFamily="34" charset="-122"/>
+                <a:cs typeface="Consolas" pitchFamily="34" charset="-120"/>
+              </a:rPr>
+              <a:t>‹code›  </a:t>
+            </a:r>
+            <a:pPr indent="0" marL="0">
+              <a:buNone/>
+            </a:pPr>
+            <a:r>
+              <a:rPr lang="en-US" sz="900" dirty="0">
+                <a:solidFill>
+                  <a:srgbClr val="8FA3C8"/>
+                </a:solidFill>
+                <a:latin typeface="Consolas" pitchFamily="34" charset="0"/>
+                <a:ea typeface="Consolas" pitchFamily="34" charset="-122"/>
+                <a:cs typeface="Consolas" pitchFamily="34" charset="-120"/>
+              </a:rPr>
+              <a:t>兩份大綱 docs/collaboration_workflow_outline.md · docs/teaching_slides_outline.md ｜ 技術 docs/evolution_design_notes.md</a:t>
+            </a:r>
+            <a:endParaRPr lang="en-US" sz="900" dirty="0"/>
+          </a:p>
+        </p:txBody>
+      </p:sp>
     </p:spTree>
   </p:cSld>
   <p:clrMapOvr>
@@ -14907,6 +15914,59 @@
           </a:p>
         </p:txBody>
       </p:sp>
+      <p:sp>
+        <p:nvSpPr>
+          <p:cNvPr id="36" name="Text 34"/>
+          <p:cNvSpPr/>
+          <p:nvPr/>
+        </p:nvSpPr>
+        <p:spPr>
+          <a:xfrm>
+            <a:off x="502920" y="6583680"/>
+            <a:ext cx="11338560" cy="201168"/>
+          </a:xfrm>
+          <a:prstGeom prst="rect">
+            <a:avLst/>
+          </a:prstGeom>
+          <a:noFill/>
+          <a:ln/>
+        </p:spPr>
+        <p:txBody>
+          <a:bodyPr wrap="square" lIns="0" tIns="0" rIns="0" bIns="0" rtlCol="0" anchor="ctr"/>
+          <a:lstStyle/>
+          <a:p>
+            <a:pPr indent="0" marL="0">
+              <a:buNone/>
+            </a:pPr>
+            <a:r>
+              <a:rPr lang="en-US" sz="900" b="1" dirty="0">
+                <a:solidFill>
+                  <a:srgbClr val="E8A33D"/>
+                </a:solidFill>
+                <a:latin typeface="Consolas" pitchFamily="34" charset="0"/>
+                <a:ea typeface="Consolas" pitchFamily="34" charset="-122"/>
+                <a:cs typeface="Consolas" pitchFamily="34" charset="-120"/>
+              </a:rPr>
+              <a:t>‹code›  </a:t>
+            </a:r>
+            <a:pPr indent="0" marL="0">
+              <a:buNone/>
+            </a:pPr>
+            <a:r>
+              <a:rPr lang="en-US" sz="900" dirty="0">
+                <a:solidFill>
+                  <a:srgbClr val="6B7280"/>
+                </a:solidFill>
+                <a:latin typeface="Consolas" pitchFamily="34" charset="0"/>
+                <a:ea typeface="Consolas" pitchFamily="34" charset="-122"/>
+                <a:cs typeface="Consolas" pitchFamily="34" charset="-120"/>
+              </a:rPr>
+              <a:t>完整文字：docs/collaboration_workflow_outline.md ｜ 技術細節：docs/evolution_design_notes.md</a:t>
+            </a:r>
+            <a:endParaRPr lang="en-US" sz="900" dirty="0"/>
+          </a:p>
+        </p:txBody>
+      </p:sp>
     </p:spTree>
   </p:cSld>
   <p:clrMapOvr>
@@ -15652,6 +16712,59 @@
           </a:p>
         </p:txBody>
       </p:sp>
+      <p:sp>
+        <p:nvSpPr>
+          <p:cNvPr id="21" name="Text 19"/>
+          <p:cNvSpPr/>
+          <p:nvPr/>
+        </p:nvSpPr>
+        <p:spPr>
+          <a:xfrm>
+            <a:off x="502920" y="6583680"/>
+            <a:ext cx="11338560" cy="201168"/>
+          </a:xfrm>
+          <a:prstGeom prst="rect">
+            <a:avLst/>
+          </a:prstGeom>
+          <a:noFill/>
+          <a:ln/>
+        </p:spPr>
+        <p:txBody>
+          <a:bodyPr wrap="square" lIns="0" tIns="0" rIns="0" bIns="0" rtlCol="0" anchor="ctr"/>
+          <a:lstStyle/>
+          <a:p>
+            <a:pPr indent="0" marL="0">
+              <a:buNone/>
+            </a:pPr>
+            <a:r>
+              <a:rPr lang="en-US" sz="900" b="1" dirty="0">
+                <a:solidFill>
+                  <a:srgbClr val="E8A33D"/>
+                </a:solidFill>
+                <a:latin typeface="Consolas" pitchFamily="34" charset="0"/>
+                <a:ea typeface="Consolas" pitchFamily="34" charset="-122"/>
+                <a:cs typeface="Consolas" pitchFamily="34" charset="-120"/>
+              </a:rPr>
+              <a:t>‹code›  </a:t>
+            </a:r>
+            <a:pPr indent="0" marL="0">
+              <a:buNone/>
+            </a:pPr>
+            <a:r>
+              <a:rPr lang="en-US" sz="900" dirty="0">
+                <a:solidFill>
+                  <a:srgbClr val="6B7280"/>
+                </a:solidFill>
+                <a:latin typeface="Consolas" pitchFamily="34" charset="0"/>
+                <a:ea typeface="Consolas" pitchFamily="34" charset="-122"/>
+                <a:cs typeface="Consolas" pitchFamily="34" charset="-120"/>
+              </a:rPr>
+              <a:t>我+Claude 寫 config/agents.yaml（正式）· config/agents_evolving.yaml（種子）｜ OpenEvolve 改 evolvable_tools.py:18-58</a:t>
+            </a:r>
+            <a:endParaRPr lang="en-US" sz="900" dirty="0"/>
+          </a:p>
+        </p:txBody>
+      </p:sp>
     </p:spTree>
   </p:cSld>
   <p:clrMapOvr>
@@ -16328,6 +17441,59 @@
           </a:p>
         </p:txBody>
       </p:sp>
+      <p:sp>
+        <p:nvSpPr>
+          <p:cNvPr id="21" name="Text 19"/>
+          <p:cNvSpPr/>
+          <p:nvPr/>
+        </p:nvSpPr>
+        <p:spPr>
+          <a:xfrm>
+            <a:off x="502920" y="6583680"/>
+            <a:ext cx="11338560" cy="201168"/>
+          </a:xfrm>
+          <a:prstGeom prst="rect">
+            <a:avLst/>
+          </a:prstGeom>
+          <a:noFill/>
+          <a:ln/>
+        </p:spPr>
+        <p:txBody>
+          <a:bodyPr wrap="square" lIns="0" tIns="0" rIns="0" bIns="0" rtlCol="0" anchor="ctr"/>
+          <a:lstStyle/>
+          <a:p>
+            <a:pPr indent="0" marL="0">
+              <a:buNone/>
+            </a:pPr>
+            <a:r>
+              <a:rPr lang="en-US" sz="900" b="1" dirty="0">
+                <a:solidFill>
+                  <a:srgbClr val="E8A33D"/>
+                </a:solidFill>
+                <a:latin typeface="Consolas" pitchFamily="34" charset="0"/>
+                <a:ea typeface="Consolas" pitchFamily="34" charset="-122"/>
+                <a:cs typeface="Consolas" pitchFamily="34" charset="-120"/>
+              </a:rPr>
+              <a:t>‹code›  </a:t>
+            </a:r>
+            <a:pPr indent="0" marL="0">
+              <a:buNone/>
+            </a:pPr>
+            <a:r>
+              <a:rPr lang="en-US" sz="900" dirty="0">
+                <a:solidFill>
+                  <a:srgbClr val="6B7280"/>
+                </a:solidFill>
+                <a:latin typeface="Consolas" pitchFamily="34" charset="0"/>
+                <a:ea typeface="Consolas" pitchFamily="34" charset="-122"/>
+                <a:cs typeface="Consolas" pitchFamily="34" charset="-120"/>
+              </a:rPr>
+              <a:t>我→config/*.yaml ｜ Claude→src/tools/ + src/crews/ + src/flows/ ｜ OpenEvolve→agents_evolving.yaml:1-44 EVOLVE-BLOCK</a:t>
+            </a:r>
+            <a:endParaRPr lang="en-US" sz="900" dirty="0"/>
+          </a:p>
+        </p:txBody>
+      </p:sp>
     </p:spTree>
   </p:cSld>
   <p:clrMapOvr>
@@ -17219,7 +18385,7 @@
         </p:nvSpPr>
         <p:spPr>
           <a:xfrm>
-            <a:off x="548640" y="5989320"/>
+            <a:off x="548640" y="5943600"/>
             <a:ext cx="11109960" cy="457200"/>
           </a:xfrm>
           <a:prstGeom prst="rect">
@@ -17247,6 +18413,59 @@
               <a:t>不是誰比較強，是不同物種、各補一塊——Claude 會精準設計但不會盲搜，OpenEvolve 會盲搜但不懂自己找到了什麼。</a:t>
             </a:r>
             <a:endParaRPr lang="en-US" sz="1350" dirty="0"/>
+          </a:p>
+        </p:txBody>
+      </p:sp>
+      <p:sp>
+        <p:nvSpPr>
+          <p:cNvPr id="26" name="Text 24"/>
+          <p:cNvSpPr/>
+          <p:nvPr/>
+        </p:nvSpPr>
+        <p:spPr>
+          <a:xfrm>
+            <a:off x="502920" y="6583680"/>
+            <a:ext cx="11338560" cy="201168"/>
+          </a:xfrm>
+          <a:prstGeom prst="rect">
+            <a:avLst/>
+          </a:prstGeom>
+          <a:noFill/>
+          <a:ln/>
+        </p:spPr>
+        <p:txBody>
+          <a:bodyPr wrap="square" lIns="0" tIns="0" rIns="0" bIns="0" rtlCol="0" anchor="ctr"/>
+          <a:lstStyle/>
+          <a:p>
+            <a:pPr indent="0" marL="0">
+              <a:buNone/>
+            </a:pPr>
+            <a:r>
+              <a:rPr lang="en-US" sz="900" b="1" dirty="0">
+                <a:solidFill>
+                  <a:srgbClr val="E8A33D"/>
+                </a:solidFill>
+                <a:latin typeface="Consolas" pitchFamily="34" charset="0"/>
+                <a:ea typeface="Consolas" pitchFamily="34" charset="-122"/>
+                <a:cs typeface="Consolas" pitchFamily="34" charset="-120"/>
+              </a:rPr>
+              <a:t>‹code›  </a:t>
+            </a:r>
+            <a:pPr indent="0" marL="0">
+              <a:buNone/>
+            </a:pPr>
+            <a:r>
+              <a:rPr lang="en-US" sz="900" dirty="0">
+                <a:solidFill>
+                  <a:srgbClr val="6B7280"/>
+                </a:solidFill>
+                <a:latin typeface="Consolas" pitchFamily="34" charset="0"/>
+                <a:ea typeface="Consolas" pitchFamily="34" charset="-122"/>
+                <a:cs typeface="Consolas" pitchFamily="34" charset="-120"/>
+              </a:rPr>
+              <a:t>Claude 搭框架 src/tools/tool_loader.py（77 AST / 120 沙箱）· OpenEvolve 在 evolvable_tools.py:18-58 EVOLVE-BLOCK 內探索</a:t>
+            </a:r>
+            <a:endParaRPr lang="en-US" sz="900" dirty="0"/>
           </a:p>
         </p:txBody>
       </p:sp>
@@ -17613,7 +18832,7 @@
                   </a:tcPr>
                 </a:tc>
               </a:tr>
-              <a:tr h="868680">
+              <a:tr h="822960">
                 <a:tc>
                   <a:txBody>
                     <a:bodyPr/>
@@ -17819,7 +19038,7 @@
                   </a:tcPr>
                 </a:tc>
               </a:tr>
-              <a:tr h="868680">
+              <a:tr h="822960">
                 <a:tc>
                   <a:txBody>
                     <a:bodyPr/>
@@ -18025,7 +19244,7 @@
                   </a:tcPr>
                 </a:tc>
               </a:tr>
-              <a:tr h="868680">
+              <a:tr h="822960">
                 <a:tc>
                   <a:txBody>
                     <a:bodyPr/>
@@ -18243,8 +19462,8 @@
         </p:nvSpPr>
         <p:spPr>
           <a:xfrm>
-            <a:off x="548640" y="5486400"/>
-            <a:ext cx="11109960" cy="914400"/>
+            <a:off x="548640" y="5440680"/>
+            <a:ext cx="11109960" cy="868680"/>
           </a:xfrm>
           <a:prstGeom prst="rect">
             <a:avLst/>
@@ -18275,8 +19494,8 @@
         </p:nvSpPr>
         <p:spPr>
           <a:xfrm>
-            <a:off x="868680" y="5486400"/>
-            <a:ext cx="10515600" cy="914400"/>
+            <a:off x="868680" y="5440680"/>
+            <a:ext cx="10515600" cy="868680"/>
           </a:xfrm>
           <a:prstGeom prst="rect">
             <a:avLst/>
@@ -18303,6 +19522,59 @@
               <a:t>金句：我越是放手讓它自主，越要先建好「最壞只是退化、不是崩潰」的護欄。</a:t>
             </a:r>
             <a:endParaRPr lang="en-US" sz="1800" dirty="0"/>
+          </a:p>
+        </p:txBody>
+      </p:sp>
+      <p:sp>
+        <p:nvSpPr>
+          <p:cNvPr id="8" name="Text 5"/>
+          <p:cNvSpPr/>
+          <p:nvPr/>
+        </p:nvSpPr>
+        <p:spPr>
+          <a:xfrm>
+            <a:off x="502920" y="6583680"/>
+            <a:ext cx="11338560" cy="201168"/>
+          </a:xfrm>
+          <a:prstGeom prst="rect">
+            <a:avLst/>
+          </a:prstGeom>
+          <a:noFill/>
+          <a:ln/>
+        </p:spPr>
+        <p:txBody>
+          <a:bodyPr wrap="square" lIns="0" tIns="0" rIns="0" bIns="0" rtlCol="0" anchor="ctr"/>
+          <a:lstStyle/>
+          <a:p>
+            <a:pPr indent="0" marL="0">
+              <a:buNone/>
+            </a:pPr>
+            <a:r>
+              <a:rPr lang="en-US" sz="900" b="1" dirty="0">
+                <a:solidFill>
+                  <a:srgbClr val="E8A33D"/>
+                </a:solidFill>
+                <a:latin typeface="Consolas" pitchFamily="34" charset="0"/>
+                <a:ea typeface="Consolas" pitchFamily="34" charset="-122"/>
+                <a:cs typeface="Consolas" pitchFamily="34" charset="-120"/>
+              </a:rPr>
+              <a:t>‹code›  </a:t>
+            </a:r>
+            <a:pPr indent="0" marL="0">
+              <a:buNone/>
+            </a:pPr>
+            <a:r>
+              <a:rPr lang="en-US" sz="900" dirty="0">
+                <a:solidFill>
+                  <a:srgbClr val="6B7280"/>
+                </a:solidFill>
+                <a:latin typeface="Consolas" pitchFamily="34" charset="0"/>
+                <a:ea typeface="Consolas" pitchFamily="34" charset="-122"/>
+                <a:cs typeface="Consolas" pitchFamily="34" charset="-120"/>
+              </a:rPr>
+              <a:t>護欄落地：retrieval_executor.py:53 normalize_policy（clamp）· tool_loader.py:77-177（AST→沙箱→包裝）</a:t>
+            </a:r>
+            <a:endParaRPr lang="en-US" sz="900" dirty="0"/>
           </a:p>
         </p:txBody>
       </p:sp>
@@ -18444,7 +19716,7 @@
         </p:nvSpPr>
         <p:spPr>
           <a:xfrm>
-            <a:off x="4992624" y="1805940"/>
+            <a:off x="4992624" y="1851660"/>
             <a:ext cx="2194560" cy="777240"/>
           </a:xfrm>
           <a:prstGeom prst="rect">
@@ -18476,7 +19748,7 @@
         </p:nvSpPr>
         <p:spPr>
           <a:xfrm>
-            <a:off x="4992624" y="1805940"/>
+            <a:off x="4992624" y="1851660"/>
             <a:ext cx="91440" cy="777240"/>
           </a:xfrm>
           <a:prstGeom prst="rect">
@@ -18496,7 +19768,7 @@
         </p:nvSpPr>
         <p:spPr>
           <a:xfrm>
-            <a:off x="5157216" y="1805940"/>
+            <a:off x="5157216" y="1851660"/>
             <a:ext cx="1965960" cy="777240"/>
           </a:xfrm>
           <a:prstGeom prst="rect">
@@ -18535,7 +19807,7 @@
         </p:nvSpPr>
         <p:spPr>
           <a:xfrm>
-            <a:off x="8427726" y="2974834"/>
+            <a:off x="8427726" y="2925779"/>
             <a:ext cx="2194560" cy="777240"/>
           </a:xfrm>
           <a:prstGeom prst="rect">
@@ -18567,7 +19839,7 @@
         </p:nvSpPr>
         <p:spPr>
           <a:xfrm>
-            <a:off x="8427726" y="2974834"/>
+            <a:off x="8427726" y="2925779"/>
             <a:ext cx="91440" cy="777240"/>
           </a:xfrm>
           <a:prstGeom prst="rect">
@@ -18587,7 +19859,7 @@
         </p:nvSpPr>
         <p:spPr>
           <a:xfrm>
-            <a:off x="8592318" y="2974834"/>
+            <a:off x="8592318" y="2925779"/>
             <a:ext cx="1965960" cy="777240"/>
           </a:xfrm>
           <a:prstGeom prst="rect">
@@ -18626,7 +19898,7 @@
         </p:nvSpPr>
         <p:spPr>
           <a:xfrm>
-            <a:off x="7115634" y="4866146"/>
+            <a:off x="7115634" y="4663741"/>
             <a:ext cx="2194560" cy="777240"/>
           </a:xfrm>
           <a:prstGeom prst="rect">
@@ -18658,7 +19930,7 @@
         </p:nvSpPr>
         <p:spPr>
           <a:xfrm>
-            <a:off x="7115634" y="4866146"/>
+            <a:off x="7115634" y="4663741"/>
             <a:ext cx="91440" cy="777240"/>
           </a:xfrm>
           <a:prstGeom prst="rect">
@@ -18678,7 +19950,7 @@
         </p:nvSpPr>
         <p:spPr>
           <a:xfrm>
-            <a:off x="7280226" y="4866146"/>
+            <a:off x="7280226" y="4663741"/>
             <a:ext cx="1965960" cy="777240"/>
           </a:xfrm>
           <a:prstGeom prst="rect">
@@ -18717,7 +19989,7 @@
         </p:nvSpPr>
         <p:spPr>
           <a:xfrm>
-            <a:off x="2869614" y="4866146"/>
+            <a:off x="2869614" y="4663741"/>
             <a:ext cx="2194560" cy="777240"/>
           </a:xfrm>
           <a:prstGeom prst="rect">
@@ -18749,7 +20021,7 @@
         </p:nvSpPr>
         <p:spPr>
           <a:xfrm>
-            <a:off x="2869614" y="4866146"/>
+            <a:off x="2869614" y="4663741"/>
             <a:ext cx="91440" cy="777240"/>
           </a:xfrm>
           <a:prstGeom prst="rect">
@@ -18769,7 +20041,7 @@
         </p:nvSpPr>
         <p:spPr>
           <a:xfrm>
-            <a:off x="3034206" y="4866146"/>
+            <a:off x="3034206" y="4663741"/>
             <a:ext cx="1965960" cy="777240"/>
           </a:xfrm>
           <a:prstGeom prst="rect">
@@ -18808,7 +20080,7 @@
         </p:nvSpPr>
         <p:spPr>
           <a:xfrm>
-            <a:off x="1557522" y="2974834"/>
+            <a:off x="1557522" y="2925779"/>
             <a:ext cx="2194560" cy="777240"/>
           </a:xfrm>
           <a:prstGeom prst="rect">
@@ -18840,7 +20112,7 @@
         </p:nvSpPr>
         <p:spPr>
           <a:xfrm>
-            <a:off x="1557522" y="2974834"/>
+            <a:off x="1557522" y="2925779"/>
             <a:ext cx="91440" cy="777240"/>
           </a:xfrm>
           <a:prstGeom prst="rect">
@@ -18860,7 +20132,7 @@
         </p:nvSpPr>
         <p:spPr>
           <a:xfrm>
-            <a:off x="1722114" y="2974834"/>
+            <a:off x="1722114" y="2925779"/>
             <a:ext cx="1965960" cy="777240"/>
           </a:xfrm>
           <a:prstGeom prst="rect">
@@ -18899,7 +20171,7 @@
         </p:nvSpPr>
         <p:spPr>
           <a:xfrm>
-            <a:off x="5541264" y="3291840"/>
+            <a:off x="5541264" y="3200400"/>
             <a:ext cx="1097280" cy="1097280"/>
           </a:xfrm>
           <a:prstGeom prst="rect">
@@ -18938,7 +20210,7 @@
         </p:nvSpPr>
         <p:spPr>
           <a:xfrm>
-            <a:off x="5175504" y="4343400"/>
+            <a:off x="5175504" y="4251960"/>
             <a:ext cx="1828800" cy="365760"/>
           </a:xfrm>
           <a:prstGeom prst="rect">
@@ -18966,6 +20238,59 @@
               <a:t>（下一輪意圖）</a:t>
             </a:r>
             <a:endParaRPr lang="en-US" sz="1100" dirty="0"/>
+          </a:p>
+        </p:txBody>
+      </p:sp>
+      <p:sp>
+        <p:nvSpPr>
+          <p:cNvPr id="22" name="Text 20"/>
+          <p:cNvSpPr/>
+          <p:nvPr/>
+        </p:nvSpPr>
+        <p:spPr>
+          <a:xfrm>
+            <a:off x="502920" y="6583680"/>
+            <a:ext cx="11338560" cy="201168"/>
+          </a:xfrm>
+          <a:prstGeom prst="rect">
+            <a:avLst/>
+          </a:prstGeom>
+          <a:noFill/>
+          <a:ln/>
+        </p:spPr>
+        <p:txBody>
+          <a:bodyPr wrap="square" lIns="0" tIns="0" rIns="0" bIns="0" rtlCol="0" anchor="ctr"/>
+          <a:lstStyle/>
+          <a:p>
+            <a:pPr indent="0" marL="0">
+              <a:buNone/>
+            </a:pPr>
+            <a:r>
+              <a:rPr lang="en-US" sz="900" b="1" dirty="0">
+                <a:solidFill>
+                  <a:srgbClr val="E8A33D"/>
+                </a:solidFill>
+                <a:latin typeface="Consolas" pitchFamily="34" charset="0"/>
+                <a:ea typeface="Consolas" pitchFamily="34" charset="-122"/>
+                <a:cs typeface="Consolas" pitchFamily="34" charset="-120"/>
+              </a:rPr>
+              <a:t>‹code›  </a:t>
+            </a:r>
+            <a:pPr indent="0" marL="0">
+              <a:buNone/>
+            </a:pPr>
+            <a:r>
+              <a:rPr lang="en-US" sz="900" dirty="0">
+                <a:solidFill>
+                  <a:srgbClr val="6B7280"/>
+                </a:solidFill>
+                <a:latin typeface="Consolas" pitchFamily="34" charset="0"/>
+                <a:ea typeface="Consolas" pitchFamily="34" charset="-122"/>
+                <a:cs typeface="Consolas" pitchFamily="34" charset="-120"/>
+              </a:rPr>
+              <a:t>工作流見 CLAUDE.md「Git 工作流程」(main 只接受 PR) · 已落地 PR 對照 docs/evolution_design_notes.md §11</a:t>
+            </a:r>
+            <a:endParaRPr lang="en-US" sz="900" dirty="0"/>
           </a:p>
         </p:txBody>
       </p:sp>
@@ -19158,6 +20483,59 @@
               <a:t>協作不再是單層。我想用這個專案示範：如何安全地把自主性一層層往下委派。</a:t>
             </a:r>
             <a:endParaRPr lang="en-US" sz="1900" dirty="0"/>
+          </a:p>
+        </p:txBody>
+      </p:sp>
+      <p:sp>
+        <p:nvSpPr>
+          <p:cNvPr id="6" name="Text 4"/>
+          <p:cNvSpPr/>
+          <p:nvPr/>
+        </p:nvSpPr>
+        <p:spPr>
+          <a:xfrm>
+            <a:off x="502920" y="6583680"/>
+            <a:ext cx="11338560" cy="201168"/>
+          </a:xfrm>
+          <a:prstGeom prst="rect">
+            <a:avLst/>
+          </a:prstGeom>
+          <a:noFill/>
+          <a:ln/>
+        </p:spPr>
+        <p:txBody>
+          <a:bodyPr wrap="square" lIns="0" tIns="0" rIns="0" bIns="0" rtlCol="0" anchor="ctr"/>
+          <a:lstStyle/>
+          <a:p>
+            <a:pPr indent="0" marL="0">
+              <a:buNone/>
+            </a:pPr>
+            <a:r>
+              <a:rPr lang="en-US" sz="900" b="1" dirty="0">
+                <a:solidFill>
+                  <a:srgbClr val="E8A33D"/>
+                </a:solidFill>
+                <a:latin typeface="Consolas" pitchFamily="34" charset="0"/>
+                <a:ea typeface="Consolas" pitchFamily="34" charset="-122"/>
+                <a:cs typeface="Consolas" pitchFamily="34" charset="-120"/>
+              </a:rPr>
+              <a:t>‹code›  </a:t>
+            </a:r>
+            <a:pPr indent="0" marL="0">
+              <a:buNone/>
+            </a:pPr>
+            <a:r>
+              <a:rPr lang="en-US" sz="900" dirty="0">
+                <a:solidFill>
+                  <a:srgbClr val="8FA3C8"/>
+                </a:solidFill>
+                <a:latin typeface="Consolas" pitchFamily="34" charset="0"/>
+                <a:ea typeface="Consolas" pitchFamily="34" charset="-122"/>
+                <a:cs typeface="Consolas" pitchFamily="34" charset="-120"/>
+              </a:rPr>
+              <a:t>整體目標見 docs/evolution_design_notes.md §1（背景與目標）</a:t>
+            </a:r>
+            <a:endParaRPr lang="en-US" sz="900" dirty="0"/>
           </a:p>
         </p:txBody>
       </p:sp>
